--- a/Analytica project 3 ppt.pptx
+++ b/Analytica project 3 ppt.pptx
@@ -3096,15 +3096,14 @@
               <a:buNone/>
             </a:pPr>
             <a:r>
-              <a:rPr lang="en-US" sz="900" dirty="0">
+              <a:rPr lang="en-US" sz="900">
                 <a:solidFill>
                   <a:srgbClr val="4B5563"/>
                 </a:solidFill>
                 <a:latin typeface="Calibri" pitchFamily="34" charset="0"/>
-                <a:ea typeface="Calibri" pitchFamily="34" charset="-122"/>
                 <a:cs typeface="Calibri" pitchFamily="34" charset="-120"/>
               </a:rPr>
-              <a:t>Total Orders</a:t>
+              <a:t>Samples Tested</a:t>
             </a:r>
             <a:endParaRPr lang="en-US" sz="900" dirty="0"/>
           </a:p>
@@ -7826,7 +7825,7 @@
                 <a:ea typeface="Calibri" pitchFamily="34" charset="-122"/>
                 <a:cs typeface="Calibri" pitchFamily="34" charset="-120"/>
               </a:rPr>
-              <a:t>100,000 total orders · 10,000 samples analyzed · 23 variables</a:t>
+              <a:t>100,000 samples analyzed · 23 variables</a:t>
             </a:r>
             <a:endParaRPr lang="en-US" sz="1300" dirty="0"/>
           </a:p>
